--- a/sistemas-informacao/programacao-internet/modulo-02-javascript/Aula03-Implementado o CRUD/GET-Paginacao/Aula_Paginacao.pptx
+++ b/sistemas-informacao/programacao-internet/modulo-02-javascript/Aula03-Implementado o CRUD/GET-Paginacao/Aula_Paginacao.pptx
@@ -3679,7 +3679,7 @@
           <a:lstStyle/>
           <a:p>
             <a:fld id="{CDD55C27-F8C6-4481-8569-CAC50CAE9F1F}" type="datetimeFigureOut">
-              <a:t>25/09/2026</a:t>
+              <a:t>29/09/2026</a:t>
             </a:fld>
             <a:endParaRPr/>
           </a:p>
@@ -3809,7 +3809,7 @@
           <a:lstStyle/>
           <a:p>
             <a:fld id="{CDD55C27-F8C6-4481-8569-CAC50CAE9F1F}" type="datetimeFigureOut">
-              <a:t>25/09/2026</a:t>
+              <a:t>29/09/2026</a:t>
             </a:fld>
             <a:endParaRPr/>
           </a:p>
@@ -4555,7 +4555,7 @@
           <a:lstStyle/>
           <a:p>
             <a:fld id="{CDD55C27-F8C6-4481-8569-CAC50CAE9F1F}" type="datetimeFigureOut">
-              <a:t>25/09/2026</a:t>
+              <a:t>29/09/2026</a:t>
             </a:fld>
             <a:endParaRPr/>
           </a:p>
@@ -4729,7 +4729,7 @@
           <a:lstStyle/>
           <a:p>
             <a:fld id="{CDD55C27-F8C6-4481-8569-CAC50CAE9F1F}" type="datetimeFigureOut">
-              <a:t>25/09/2026</a:t>
+              <a:t>29/09/2026</a:t>
             </a:fld>
             <a:endParaRPr/>
           </a:p>
@@ -4903,7 +4903,7 @@
           <a:lstStyle/>
           <a:p>
             <a:fld id="{CDD55C27-F8C6-4481-8569-CAC50CAE9F1F}" type="datetimeFigureOut">
-              <a:t>25/09/2026</a:t>
+              <a:t>29/09/2026</a:t>
             </a:fld>
             <a:endParaRPr/>
           </a:p>
@@ -5108,7 +5108,7 @@
           <a:lstStyle/>
           <a:p>
             <a:fld id="{CDD55C27-F8C6-4481-8569-CAC50CAE9F1F}" type="datetimeFigureOut">
-              <a:t>25/09/2026</a:t>
+              <a:t>29/09/2026</a:t>
             </a:fld>
             <a:endParaRPr/>
           </a:p>
@@ -5568,7 +5568,7 @@
           <a:lstStyle/>
           <a:p>
             <a:fld id="{CDD55C27-F8C6-4481-8569-CAC50CAE9F1F}" type="datetimeFigureOut">
-              <a:t>25/09/2026</a:t>
+              <a:t>29/09/2026</a:t>
             </a:fld>
             <a:endParaRPr/>
           </a:p>
@@ -26747,8 +26747,71 @@
                 <a:ea typeface="Consolas"/>
                 <a:cs typeface="Consolas"/>
               </a:rPr>
-              <a:t>http://localhost:3000/produtos?_page=2&amp;_per_page=2</a:t>
-            </a:r>
+              <a:t>http://localhost:3000/produtos?_page=</a:t>
+            </a:r>
+            <a:r>
+              <a:rPr lang="pt-BR" sz="1800" dirty="0">
+                <a:solidFill>
+                  <a:srgbClr val="153B75"/>
+                </a:solidFill>
+                <a:latin typeface="Consolas"/>
+                <a:ea typeface="Consolas"/>
+                <a:cs typeface="Consolas"/>
+              </a:rPr>
+              <a:t>1</a:t>
+            </a:r>
+            <a:r>
+              <a:rPr sz="1800" dirty="0">
+                <a:solidFill>
+                  <a:srgbClr val="153B75"/>
+                </a:solidFill>
+                <a:latin typeface="Consolas"/>
+                <a:ea typeface="Consolas"/>
+                <a:cs typeface="Consolas"/>
+              </a:rPr>
+              <a:t>&amp;_</a:t>
+            </a:r>
+            <a:r>
+              <a:rPr sz="1800" dirty="0" err="1">
+                <a:solidFill>
+                  <a:srgbClr val="153B75"/>
+                </a:solidFill>
+                <a:latin typeface="Consolas"/>
+                <a:ea typeface="Consolas"/>
+                <a:cs typeface="Consolas"/>
+              </a:rPr>
+              <a:t>per_page</a:t>
+            </a:r>
+            <a:r>
+              <a:rPr sz="1800" dirty="0">
+                <a:solidFill>
+                  <a:srgbClr val="153B75"/>
+                </a:solidFill>
+                <a:latin typeface="Consolas"/>
+                <a:ea typeface="Consolas"/>
+                <a:cs typeface="Consolas"/>
+              </a:rPr>
+              <a:t>=</a:t>
+            </a:r>
+            <a:r>
+              <a:rPr lang="pt-BR" sz="1800" dirty="0">
+                <a:solidFill>
+                  <a:srgbClr val="153B75"/>
+                </a:solidFill>
+                <a:latin typeface="Consolas"/>
+                <a:ea typeface="Consolas"/>
+                <a:cs typeface="Consolas"/>
+              </a:rPr>
+              <a:t>1</a:t>
+            </a:r>
+            <a:endParaRPr sz="1800" dirty="0">
+              <a:solidFill>
+                <a:srgbClr val="153B75"/>
+              </a:solidFill>
+              <a:latin typeface="Consolas"/>
+              <a:ea typeface="Consolas"/>
+              <a:cs typeface="Consolas"/>
+            </a:endParaRPr>
           </a:p>
         </p:txBody>
       </p:sp>
